--- a/system-design-101/vi/lessons/sd-07-011/slides/sd-07-011.pptx
+++ b/system-design-101/vi/lessons/sd-07-011/slides/sd-07-011.pptx
@@ -7006,6 +7006,28 @@
               <a:buNone/>
             </a:pPr>
             <a:r>
+              <a:rPr lang="en-US" sz="2550" b="1" dirty="0" spc="-3" kern="0">
+                <a:solidFill>
+                  <a:srgbClr val="14161C"/>
+                </a:solidFill>
+                <a:latin typeface="Be Vietnam Pro" pitchFamily="34" charset="0"/>
+                <a:ea typeface="Be Vietnam Pro" pitchFamily="34" charset="-122"/>
+                <a:cs typeface="Be Vietnam Pro" pitchFamily="34" charset="-120"/>
+              </a:rPr>
+              <a:t>Ví</a:t>
+            </a:r>
+            <a:r>
+              <a:rPr lang="en-US" sz="2550" b="1" dirty="0" spc="1" kern="0">
+                <a:solidFill>
+                  <a:srgbClr val="14161C"/>
+                </a:solidFill>
+                <a:latin typeface="Be Vietnam Pro" pitchFamily="34" charset="0"/>
+                <a:ea typeface="Be Vietnam Pro" pitchFamily="34" charset="-122"/>
+                <a:cs typeface="Be Vietnam Pro" pitchFamily="34" charset="-120"/>
+              </a:rPr>
+              <a:t> dụ:</a:t>
+            </a:r>
+            <a:r>
               <a:rPr lang="en-US" sz="2550" b="1" dirty="0" spc="-2" kern="0">
                 <a:solidFill>
                   <a:srgbClr val="14161C"/>
@@ -7014,7 +7036,29 @@
                 <a:ea typeface="Be Vietnam Pro" pitchFamily="34" charset="-122"/>
                 <a:cs typeface="Be Vietnam Pro" pitchFamily="34" charset="-120"/>
               </a:rPr>
-              <a:t>A</a:t>
+              <a:t> A</a:t>
+            </a:r>
+            <a:r>
+              <a:rPr lang="en-US" sz="2550" b="1" dirty="0" spc="-5" kern="0">
+                <a:solidFill>
+                  <a:srgbClr val="14161C"/>
+                </a:solidFill>
+                <a:latin typeface="Be Vietnam Pro" pitchFamily="34" charset="0"/>
+                <a:ea typeface="Be Vietnam Pro" pitchFamily="34" charset="-122"/>
+                <a:cs typeface="Be Vietnam Pro" pitchFamily="34" charset="-120"/>
+              </a:rPr>
+              <a:t> nợ</a:t>
+            </a:r>
+            <a:r>
+              <a:rPr lang="en-US" sz="2550" b="1" dirty="0" spc="-2" kern="0">
+                <a:solidFill>
+                  <a:srgbClr val="14161C"/>
+                </a:solidFill>
+                <a:latin typeface="Be Vietnam Pro" pitchFamily="34" charset="0"/>
+                <a:ea typeface="Be Vietnam Pro" pitchFamily="34" charset="-122"/>
+                <a:cs typeface="Be Vietnam Pro" pitchFamily="34" charset="-120"/>
+              </a:rPr>
+              <a:t> B 100,</a:t>
             </a:r>
             <a:r>
               <a:rPr lang="en-US" sz="2550" b="1" dirty="0" spc="-4" kern="0">
@@ -7025,7 +7069,29 @@
                 <a:ea typeface="Be Vietnam Pro" pitchFamily="34" charset="-122"/>
                 <a:cs typeface="Be Vietnam Pro" pitchFamily="34" charset="-120"/>
               </a:rPr>
-              <a:t> nợ</a:t>
+              <a:t> B nợ</a:t>
+            </a:r>
+            <a:r>
+              <a:rPr lang="en-US" sz="2550" b="1" dirty="0" spc="-2" kern="0">
+                <a:solidFill>
+                  <a:srgbClr val="14161C"/>
+                </a:solidFill>
+                <a:latin typeface="Be Vietnam Pro" pitchFamily="34" charset="0"/>
+                <a:ea typeface="Be Vietnam Pro" pitchFamily="34" charset="-122"/>
+                <a:cs typeface="Be Vietnam Pro" pitchFamily="34" charset="-120"/>
+              </a:rPr>
+              <a:t> A 500,</a:t>
+            </a:r>
+            <a:r>
+              <a:rPr lang="en-US" sz="2550" b="1" dirty="0" spc="0" kern="0">
+                <a:solidFill>
+                  <a:srgbClr val="14161C"/>
+                </a:solidFill>
+                <a:latin typeface="Be Vietnam Pro" pitchFamily="34" charset="0"/>
+                <a:ea typeface="Be Vietnam Pro" pitchFamily="34" charset="-122"/>
+                <a:cs typeface="Be Vietnam Pro" pitchFamily="34" charset="-120"/>
+              </a:rPr>
+              <a:t> thì</a:t>
             </a:r>
             <a:r>
               <a:rPr lang="en-US" sz="2550" b="1" dirty="0" spc="-3" kern="0">
@@ -7036,10 +7102,10 @@
                 <a:ea typeface="Be Vietnam Pro" pitchFamily="34" charset="-122"/>
                 <a:cs typeface="Be Vietnam Pro" pitchFamily="34" charset="-120"/>
               </a:rPr>
-              <a:t> B 100,</a:t>
-            </a:r>
-            <a:r>
-              <a:rPr lang="en-US" sz="2550" b="1" dirty="0" spc="-2" kern="0">
+              <a:t> B</a:t>
+            </a:r>
+            <a:r>
+              <a:rPr lang="en-US" sz="2550" b="1" dirty="0" spc="-14" kern="0">
                 <a:solidFill>
                   <a:srgbClr val="14161C"/>
                 </a:solidFill>
@@ -7047,10 +7113,10 @@
                 <a:ea typeface="Be Vietnam Pro" pitchFamily="34" charset="-122"/>
                 <a:cs typeface="Be Vietnam Pro" pitchFamily="34" charset="-120"/>
               </a:rPr>
-              <a:t> B</a:t>
-            </a:r>
-            <a:r>
-              <a:rPr lang="en-US" sz="2550" b="1" dirty="0" spc="-4" kern="0">
+              <a:t> trả</a:t>
+            </a:r>
+            <a:r>
+              <a:rPr lang="en-US" sz="2550" b="1" dirty="0" spc="-1" kern="0">
                 <a:solidFill>
                   <a:srgbClr val="14161C"/>
                 </a:solidFill>
@@ -7058,73 +7124,7 @@
                 <a:ea typeface="Be Vietnam Pro" pitchFamily="34" charset="-122"/>
                 <a:cs typeface="Be Vietnam Pro" pitchFamily="34" charset="-120"/>
               </a:rPr>
-              <a:t> nợ</a:t>
-            </a:r>
-            <a:r>
-              <a:rPr lang="en-US" sz="2550" b="1" dirty="0" spc="-2" kern="0">
-                <a:solidFill>
-                  <a:srgbClr val="14161C"/>
-                </a:solidFill>
-                <a:latin typeface="Be Vietnam Pro" pitchFamily="34" charset="0"/>
-                <a:ea typeface="Be Vietnam Pro" pitchFamily="34" charset="-122"/>
-                <a:cs typeface="Be Vietnam Pro" pitchFamily="34" charset="-120"/>
-              </a:rPr>
-              <a:t> A</a:t>
-            </a:r>
-            <a:r>
-              <a:rPr lang="en-US" sz="2550" b="1" dirty="0" spc="0" kern="0">
-                <a:solidFill>
-                  <a:srgbClr val="14161C"/>
-                </a:solidFill>
-                <a:latin typeface="Be Vietnam Pro" pitchFamily="34" charset="0"/>
-                <a:ea typeface="Be Vietnam Pro" pitchFamily="34" charset="-122"/>
-                <a:cs typeface="Be Vietnam Pro" pitchFamily="34" charset="-120"/>
-              </a:rPr>
-              <a:t> 500:</a:t>
-            </a:r>
-            <a:r>
-              <a:rPr lang="en-US" sz="2550" b="1" dirty="0" spc="-3" kern="0">
-                <a:solidFill>
-                  <a:srgbClr val="14161C"/>
-                </a:solidFill>
-                <a:latin typeface="Be Vietnam Pro" pitchFamily="34" charset="0"/>
-                <a:ea typeface="Be Vietnam Pro" pitchFamily="34" charset="-122"/>
-                <a:cs typeface="Be Vietnam Pro" pitchFamily="34" charset="-120"/>
-              </a:rPr>
-              <a:t> B</a:t>
-            </a:r>
-            <a:r>
-              <a:rPr lang="en-US" sz="2550" b="1" dirty="0" spc="-14" kern="0">
-                <a:solidFill>
-                  <a:srgbClr val="14161C"/>
-                </a:solidFill>
-                <a:latin typeface="Be Vietnam Pro" pitchFamily="34" charset="0"/>
-                <a:ea typeface="Be Vietnam Pro" pitchFamily="34" charset="-122"/>
-                <a:cs typeface="Be Vietnam Pro" pitchFamily="34" charset="-120"/>
-              </a:rPr>
-              <a:t> trả</a:t>
-            </a:r>
-            <a:r>
-              <a:rPr lang="en-US" sz="2550" b="1" dirty="0" spc="-1" kern="0">
-                <a:solidFill>
-                  <a:srgbClr val="14161C"/>
-                </a:solidFill>
-                <a:latin typeface="Be Vietnam Pro" pitchFamily="34" charset="0"/>
-                <a:ea typeface="Be Vietnam Pro" pitchFamily="34" charset="-122"/>
-                <a:cs typeface="Be Vietnam Pro" pitchFamily="34" charset="-120"/>
-              </a:rPr>
-              <a:t> A</a:t>
-            </a:r>
-            <a:r>
-              <a:rPr lang="en-US" sz="2550" b="1" dirty="0" spc="0" kern="0">
-                <a:solidFill>
-                  <a:srgbClr val="14161C"/>
-                </a:solidFill>
-                <a:latin typeface="Be Vietnam Pro" pitchFamily="34" charset="0"/>
-                <a:ea typeface="Be Vietnam Pro" pitchFamily="34" charset="-122"/>
-                <a:cs typeface="Be Vietnam Pro" pitchFamily="34" charset="-120"/>
-              </a:rPr>
-              <a:t> 400.</a:t>
+              <a:t> A 400.</a:t>
             </a:r>
             <a:endParaRPr lang="en-US" sz="2550" dirty="0"/>
           </a:p>
